--- a/docs/Presentation.pptx
+++ b/docs/Presentation.pptx
@@ -144,7 +144,7 @@
       </p:grpSpPr>
       <p:sp>
         <p:nvSpPr>
-          <p:cNvPr id="1439097460" name="Header Placeholder 1"/>
+          <p:cNvPr id="1280064932" name="Header Placeholder 1"/>
           <p:cNvSpPr>
             <a:spLocks noGrp="1"/>
           </p:cNvSpPr>
@@ -178,7 +178,7 @@
       </p:sp>
       <p:sp>
         <p:nvSpPr>
-          <p:cNvPr id="376336800" name="Date Placeholder 2"/>
+          <p:cNvPr id="2140681118" name="Date Placeholder 2"/>
           <p:cNvSpPr>
             <a:spLocks noGrp="1"/>
           </p:cNvSpPr>
@@ -216,7 +216,7 @@
       </p:sp>
       <p:sp>
         <p:nvSpPr>
-          <p:cNvPr id="647884500" name="Slide Image Placeholder 3"/>
+          <p:cNvPr id="1607227999" name="Slide Image Placeholder 3"/>
           <p:cNvSpPr>
             <a:spLocks noChangeAspect="1" noGrp="1" noRot="1"/>
           </p:cNvSpPr>
@@ -252,7 +252,7 @@
       </p:sp>
       <p:sp>
         <p:nvSpPr>
-          <p:cNvPr id="1310484863" name="Notes Placeholder 4"/>
+          <p:cNvPr id="1022324053" name="Notes Placeholder 4"/>
           <p:cNvSpPr>
             <a:spLocks noGrp="1"/>
           </p:cNvSpPr>
@@ -326,7 +326,7 @@
       </p:sp>
       <p:sp>
         <p:nvSpPr>
-          <p:cNvPr id="293172743" name="Footer Placeholder 5"/>
+          <p:cNvPr id="1958802936" name="Footer Placeholder 5"/>
           <p:cNvSpPr>
             <a:spLocks noGrp="1"/>
           </p:cNvSpPr>
@@ -360,7 +360,7 @@
       </p:sp>
       <p:sp>
         <p:nvSpPr>
-          <p:cNvPr id="267361707" name="Slide Number Placeholder 6"/>
+          <p:cNvPr id="1406717430" name="Slide Number Placeholder 6"/>
           <p:cNvSpPr>
             <a:spLocks noGrp="1"/>
           </p:cNvSpPr>
@@ -513,7 +513,7 @@
       </p:grpSpPr>
       <p:sp>
         <p:nvSpPr>
-          <p:cNvPr id="1135575062" name="Slide Image Placeholder 1"/>
+          <p:cNvPr id="1079904613" name="Slide Image Placeholder 1"/>
           <p:cNvSpPr>
             <a:spLocks noChangeAspect="1" noGrp="1" noRot="1"/>
           </p:cNvSpPr>
@@ -530,7 +530,7 @@
       </p:sp>
       <p:sp>
         <p:nvSpPr>
-          <p:cNvPr id="1811651561" name="Notes Placeholder 2"/>
+          <p:cNvPr id="1467517547" name="Notes Placeholder 2"/>
           <p:cNvSpPr>
             <a:spLocks noGrp="1"/>
           </p:cNvSpPr>
@@ -562,7 +562,7 @@
       </p:sp>
       <p:sp>
         <p:nvSpPr>
-          <p:cNvPr id="939415754" name="Slide Number Placeholder 3"/>
+          <p:cNvPr id="802555830" name="Slide Number Placeholder 3"/>
           <p:cNvSpPr>
             <a:spLocks noGrp="1"/>
           </p:cNvSpPr>
@@ -613,7 +613,7 @@
       </p:grpSpPr>
       <p:sp>
         <p:nvSpPr>
-          <p:cNvPr id="1734659403" name="Slide Image Placeholder 1"/>
+          <p:cNvPr id="1194306215" name="Slide Image Placeholder 1"/>
           <p:cNvSpPr>
             <a:spLocks noChangeAspect="1" noGrp="1" noRot="1"/>
           </p:cNvSpPr>
@@ -625,7 +625,7 @@
       </p:sp>
       <p:sp>
         <p:nvSpPr>
-          <p:cNvPr id="1946401801" name="Notes Placeholder 2"/>
+          <p:cNvPr id="407814055" name="Notes Placeholder 2"/>
           <p:cNvSpPr>
             <a:spLocks noGrp="1"/>
           </p:cNvSpPr>
@@ -647,7 +647,7 @@
       </p:sp>
       <p:sp>
         <p:nvSpPr>
-          <p:cNvPr id="1652231556" name="Slide Number Placeholder 3"/>
+          <p:cNvPr id="1783843797" name="Slide Number Placeholder 3"/>
           <p:cNvSpPr>
             <a:spLocks noGrp="1"/>
           </p:cNvSpPr>
@@ -698,7 +698,7 @@
       </p:grpSpPr>
       <p:sp>
         <p:nvSpPr>
-          <p:cNvPr id="329042542" name="Slide Image Placeholder 1"/>
+          <p:cNvPr id="1273848559" name="Slide Image Placeholder 1"/>
           <p:cNvSpPr>
             <a:spLocks noChangeAspect="1" noGrp="1" noRot="1"/>
           </p:cNvSpPr>
@@ -710,7 +710,7 @@
       </p:sp>
       <p:sp>
         <p:nvSpPr>
-          <p:cNvPr id="1013476721" name="Notes Placeholder 2"/>
+          <p:cNvPr id="736496164" name="Notes Placeholder 2"/>
           <p:cNvSpPr>
             <a:spLocks noGrp="1"/>
           </p:cNvSpPr>
@@ -732,7 +732,7 @@
       </p:sp>
       <p:sp>
         <p:nvSpPr>
-          <p:cNvPr id="904458773" name="Slide Number Placeholder 3"/>
+          <p:cNvPr id="1655149011" name="Slide Number Placeholder 3"/>
           <p:cNvSpPr>
             <a:spLocks noGrp="1"/>
           </p:cNvSpPr>
@@ -783,7 +783,7 @@
       </p:grpSpPr>
       <p:sp>
         <p:nvSpPr>
-          <p:cNvPr id="262327458" name="Slide Image Placeholder 1"/>
+          <p:cNvPr id="1829670800" name="Slide Image Placeholder 1"/>
           <p:cNvSpPr>
             <a:spLocks noChangeAspect="1" noGrp="1" noRot="1"/>
           </p:cNvSpPr>
@@ -795,7 +795,7 @@
       </p:sp>
       <p:sp>
         <p:nvSpPr>
-          <p:cNvPr id="72371324" name="Notes Placeholder 2"/>
+          <p:cNvPr id="888293495" name="Notes Placeholder 2"/>
           <p:cNvSpPr>
             <a:spLocks noGrp="1"/>
           </p:cNvSpPr>
@@ -817,7 +817,7 @@
       </p:sp>
       <p:sp>
         <p:nvSpPr>
-          <p:cNvPr id="1562973345" name="Slide Number Placeholder 3"/>
+          <p:cNvPr id="990615637" name="Slide Number Placeholder 3"/>
           <p:cNvSpPr>
             <a:spLocks noGrp="1"/>
           </p:cNvSpPr>
@@ -868,7 +868,7 @@
       </p:grpSpPr>
       <p:sp>
         <p:nvSpPr>
-          <p:cNvPr id="1120091100" name="Slide Image Placeholder 1"/>
+          <p:cNvPr id="1150460736" name="Slide Image Placeholder 1"/>
           <p:cNvSpPr>
             <a:spLocks noChangeAspect="1" noGrp="1" noRot="1"/>
           </p:cNvSpPr>
@@ -880,7 +880,7 @@
       </p:sp>
       <p:sp>
         <p:nvSpPr>
-          <p:cNvPr id="1591544597" name="Notes Placeholder 2"/>
+          <p:cNvPr id="171609851" name="Notes Placeholder 2"/>
           <p:cNvSpPr>
             <a:spLocks noGrp="1"/>
           </p:cNvSpPr>
@@ -902,7 +902,7 @@
       </p:sp>
       <p:sp>
         <p:nvSpPr>
-          <p:cNvPr id="934064931" name="Slide Number Placeholder 3"/>
+          <p:cNvPr id="221880860" name="Slide Number Placeholder 3"/>
           <p:cNvSpPr>
             <a:spLocks noGrp="1"/>
           </p:cNvSpPr>
@@ -953,7 +953,7 @@
       </p:grpSpPr>
       <p:sp>
         <p:nvSpPr>
-          <p:cNvPr id="1750534511" name="Slide Image Placeholder 1"/>
+          <p:cNvPr id="932543494" name="Slide Image Placeholder 1"/>
           <p:cNvSpPr>
             <a:spLocks noChangeAspect="1" noGrp="1" noRot="1"/>
           </p:cNvSpPr>
@@ -965,7 +965,7 @@
       </p:sp>
       <p:sp>
         <p:nvSpPr>
-          <p:cNvPr id="288111547" name="Notes Placeholder 2"/>
+          <p:cNvPr id="725134440" name="Notes Placeholder 2"/>
           <p:cNvSpPr>
             <a:spLocks noGrp="1"/>
           </p:cNvSpPr>
@@ -987,7 +987,7 @@
       </p:sp>
       <p:sp>
         <p:nvSpPr>
-          <p:cNvPr id="789938517" name="Slide Number Placeholder 3"/>
+          <p:cNvPr id="918757621" name="Slide Number Placeholder 3"/>
           <p:cNvSpPr>
             <a:spLocks noGrp="1"/>
           </p:cNvSpPr>
@@ -1038,7 +1038,7 @@
       </p:grpSpPr>
       <p:sp>
         <p:nvSpPr>
-          <p:cNvPr id="852282059" name="Slide Image Placeholder 1"/>
+          <p:cNvPr id="537119347" name="Slide Image Placeholder 1"/>
           <p:cNvSpPr>
             <a:spLocks noChangeAspect="1" noGrp="1" noRot="1"/>
           </p:cNvSpPr>
@@ -1050,7 +1050,7 @@
       </p:sp>
       <p:sp>
         <p:nvSpPr>
-          <p:cNvPr id="315645373" name="Notes Placeholder 2"/>
+          <p:cNvPr id="87577889" name="Notes Placeholder 2"/>
           <p:cNvSpPr>
             <a:spLocks noGrp="1"/>
           </p:cNvSpPr>
@@ -1072,7 +1072,7 @@
       </p:sp>
       <p:sp>
         <p:nvSpPr>
-          <p:cNvPr id="278342205" name="Slide Number Placeholder 3"/>
+          <p:cNvPr id="1255062315" name="Slide Number Placeholder 3"/>
           <p:cNvSpPr>
             <a:spLocks noGrp="1"/>
           </p:cNvSpPr>
@@ -1123,7 +1123,7 @@
       </p:grpSpPr>
       <p:sp>
         <p:nvSpPr>
-          <p:cNvPr id="964649280" name="Slide Image Placeholder 1"/>
+          <p:cNvPr id="1304318383" name="Slide Image Placeholder 1"/>
           <p:cNvSpPr>
             <a:spLocks noChangeAspect="1" noGrp="1" noRot="1"/>
           </p:cNvSpPr>
@@ -1135,7 +1135,7 @@
       </p:sp>
       <p:sp>
         <p:nvSpPr>
-          <p:cNvPr id="1513305033" name="Notes Placeholder 2"/>
+          <p:cNvPr id="1540494368" name="Notes Placeholder 2"/>
           <p:cNvSpPr>
             <a:spLocks noGrp="1"/>
           </p:cNvSpPr>
@@ -1157,7 +1157,7 @@
       </p:sp>
       <p:sp>
         <p:nvSpPr>
-          <p:cNvPr id="733248396" name="Slide Number Placeholder 3"/>
+          <p:cNvPr id="1169724616" name="Slide Number Placeholder 3"/>
           <p:cNvSpPr>
             <a:spLocks noGrp="1"/>
           </p:cNvSpPr>
@@ -1208,7 +1208,7 @@
       </p:grpSpPr>
       <p:sp>
         <p:nvSpPr>
-          <p:cNvPr id="859641811" name="Slide Image Placeholder 1"/>
+          <p:cNvPr id="1135088230" name="Slide Image Placeholder 1"/>
           <p:cNvSpPr>
             <a:spLocks noChangeAspect="1" noGrp="1" noRot="1"/>
           </p:cNvSpPr>
@@ -1220,7 +1220,7 @@
       </p:sp>
       <p:sp>
         <p:nvSpPr>
-          <p:cNvPr id="1206300988" name="Notes Placeholder 2"/>
+          <p:cNvPr id="1366540013" name="Notes Placeholder 2"/>
           <p:cNvSpPr>
             <a:spLocks noGrp="1"/>
           </p:cNvSpPr>
@@ -1242,7 +1242,7 @@
       </p:sp>
       <p:sp>
         <p:nvSpPr>
-          <p:cNvPr id="931520184" name="Slide Number Placeholder 3"/>
+          <p:cNvPr id="1850966723" name="Slide Number Placeholder 3"/>
           <p:cNvSpPr>
             <a:spLocks noGrp="1"/>
           </p:cNvSpPr>
@@ -1293,7 +1293,7 @@
       </p:grpSpPr>
       <p:sp>
         <p:nvSpPr>
-          <p:cNvPr id="1443486378" name="Slide Image Placeholder 1"/>
+          <p:cNvPr id="1311842067" name="Slide Image Placeholder 1"/>
           <p:cNvSpPr>
             <a:spLocks noChangeAspect="1" noGrp="1" noRot="1"/>
           </p:cNvSpPr>
@@ -1305,7 +1305,7 @@
       </p:sp>
       <p:sp>
         <p:nvSpPr>
-          <p:cNvPr id="1968256798" name="Notes Placeholder 2"/>
+          <p:cNvPr id="735164280" name="Notes Placeholder 2"/>
           <p:cNvSpPr>
             <a:spLocks noGrp="1"/>
           </p:cNvSpPr>
@@ -1327,7 +1327,7 @@
       </p:sp>
       <p:sp>
         <p:nvSpPr>
-          <p:cNvPr id="1902666488" name="Slide Number Placeholder 3"/>
+          <p:cNvPr id="1176296742" name="Slide Number Placeholder 3"/>
           <p:cNvSpPr>
             <a:spLocks noGrp="1"/>
           </p:cNvSpPr>
@@ -1378,7 +1378,7 @@
       </p:grpSpPr>
       <p:sp>
         <p:nvSpPr>
-          <p:cNvPr id="1007028135" name="Slide Image Placeholder 1"/>
+          <p:cNvPr id="488485256" name="Slide Image Placeholder 1"/>
           <p:cNvSpPr>
             <a:spLocks noChangeAspect="1" noGrp="1" noRot="1"/>
           </p:cNvSpPr>
@@ -1390,7 +1390,7 @@
       </p:sp>
       <p:sp>
         <p:nvSpPr>
-          <p:cNvPr id="1314155502" name="Notes Placeholder 2"/>
+          <p:cNvPr id="1450799891" name="Notes Placeholder 2"/>
           <p:cNvSpPr>
             <a:spLocks noGrp="1"/>
           </p:cNvSpPr>
@@ -1412,7 +1412,7 @@
       </p:sp>
       <p:sp>
         <p:nvSpPr>
-          <p:cNvPr id="762281405" name="Slide Number Placeholder 3"/>
+          <p:cNvPr id="922245954" name="Slide Number Placeholder 3"/>
           <p:cNvSpPr>
             <a:spLocks noGrp="1"/>
           </p:cNvSpPr>
@@ -1463,7 +1463,7 @@
       </p:grpSpPr>
       <p:sp>
         <p:nvSpPr>
-          <p:cNvPr id="1384605650" name="Title 1"/>
+          <p:cNvPr id="85404769" name="Title 1"/>
           <p:cNvSpPr>
             <a:spLocks noGrp="1"/>
           </p:cNvSpPr>
@@ -1498,7 +1498,7 @@
       </p:sp>
       <p:sp>
         <p:nvSpPr>
-          <p:cNvPr id="700573282" name="Subtitle 2"/>
+          <p:cNvPr id="492506299" name="Subtitle 2"/>
           <p:cNvSpPr>
             <a:spLocks noGrp="1"/>
           </p:cNvSpPr>
@@ -1566,7 +1566,7 @@
       </p:sp>
       <p:sp>
         <p:nvSpPr>
-          <p:cNvPr id="1806003881" name="Date Placeholder 3"/>
+          <p:cNvPr id="1173602919" name="Date Placeholder 3"/>
           <p:cNvSpPr>
             <a:spLocks noGrp="1"/>
           </p:cNvSpPr>
@@ -1592,7 +1592,7 @@
       </p:sp>
       <p:sp>
         <p:nvSpPr>
-          <p:cNvPr id="2067525167" name="Footer Placeholder 4"/>
+          <p:cNvPr id="1222962557" name="Footer Placeholder 4"/>
           <p:cNvSpPr>
             <a:spLocks noGrp="1"/>
           </p:cNvSpPr>
@@ -1614,7 +1614,7 @@
       </p:sp>
       <p:sp>
         <p:nvSpPr>
-          <p:cNvPr id="1927362319" name="Slide Number Placeholder 5"/>
+          <p:cNvPr id="600843343" name="Slide Number Placeholder 5"/>
           <p:cNvSpPr>
             <a:spLocks noGrp="1"/>
           </p:cNvSpPr>
@@ -1665,7 +1665,7 @@
       </p:grpSpPr>
       <p:sp>
         <p:nvSpPr>
-          <p:cNvPr id="1608530694" name="Title 1"/>
+          <p:cNvPr id="628069211" name="Title 1"/>
           <p:cNvSpPr>
             <a:spLocks noGrp="1"/>
           </p:cNvSpPr>
@@ -1691,7 +1691,7 @@
       </p:sp>
       <p:sp>
         <p:nvSpPr>
-          <p:cNvPr id="489012621" name="Vertical Text Placeholder 2"/>
+          <p:cNvPr id="1248125009" name="Vertical Text Placeholder 2"/>
           <p:cNvSpPr>
             <a:spLocks noGrp="1"/>
           </p:cNvSpPr>
@@ -1757,7 +1757,7 @@
       </p:sp>
       <p:sp>
         <p:nvSpPr>
-          <p:cNvPr id="1008184214" name="Date Placeholder 3"/>
+          <p:cNvPr id="568157676" name="Date Placeholder 3"/>
           <p:cNvSpPr>
             <a:spLocks noGrp="1"/>
           </p:cNvSpPr>
@@ -1783,7 +1783,7 @@
       </p:sp>
       <p:sp>
         <p:nvSpPr>
-          <p:cNvPr id="1489762072" name="Footer Placeholder 4"/>
+          <p:cNvPr id="1892995087" name="Footer Placeholder 4"/>
           <p:cNvSpPr>
             <a:spLocks noGrp="1"/>
           </p:cNvSpPr>
@@ -1805,7 +1805,7 @@
       </p:sp>
       <p:sp>
         <p:nvSpPr>
-          <p:cNvPr id="350351587" name="Slide Number Placeholder 5"/>
+          <p:cNvPr id="471825357" name="Slide Number Placeholder 5"/>
           <p:cNvSpPr>
             <a:spLocks noGrp="1"/>
           </p:cNvSpPr>
@@ -1856,7 +1856,7 @@
       </p:grpSpPr>
       <p:sp>
         <p:nvSpPr>
-          <p:cNvPr id="704372151" name="Vertical Title 1"/>
+          <p:cNvPr id="2035982109" name="Vertical Title 1"/>
           <p:cNvSpPr>
             <a:spLocks noGrp="1"/>
           </p:cNvSpPr>
@@ -1887,7 +1887,7 @@
       </p:sp>
       <p:sp>
         <p:nvSpPr>
-          <p:cNvPr id="1340522479" name="Vertical Text Placeholder 2"/>
+          <p:cNvPr id="1791723619" name="Vertical Text Placeholder 2"/>
           <p:cNvSpPr>
             <a:spLocks noGrp="1"/>
           </p:cNvSpPr>
@@ -1958,7 +1958,7 @@
       </p:sp>
       <p:sp>
         <p:nvSpPr>
-          <p:cNvPr id="2034398470" name="Date Placeholder 3"/>
+          <p:cNvPr id="986807999" name="Date Placeholder 3"/>
           <p:cNvSpPr>
             <a:spLocks noGrp="1"/>
           </p:cNvSpPr>
@@ -1984,7 +1984,7 @@
       </p:sp>
       <p:sp>
         <p:nvSpPr>
-          <p:cNvPr id="1377252832" name="Footer Placeholder 4"/>
+          <p:cNvPr id="293372511" name="Footer Placeholder 4"/>
           <p:cNvSpPr>
             <a:spLocks noGrp="1"/>
           </p:cNvSpPr>
@@ -2006,7 +2006,7 @@
       </p:sp>
       <p:sp>
         <p:nvSpPr>
-          <p:cNvPr id="792645871" name="Slide Number Placeholder 5"/>
+          <p:cNvPr id="1336210581" name="Slide Number Placeholder 5"/>
           <p:cNvSpPr>
             <a:spLocks noGrp="1"/>
           </p:cNvSpPr>
@@ -2057,7 +2057,7 @@
       </p:grpSpPr>
       <p:sp>
         <p:nvSpPr>
-          <p:cNvPr id="193276745" name="Title 1"/>
+          <p:cNvPr id="864954394" name="Title 1"/>
           <p:cNvSpPr>
             <a:spLocks noGrp="1"/>
           </p:cNvSpPr>
@@ -2090,7 +2090,7 @@
       </p:sp>
       <p:sp>
         <p:nvSpPr>
-          <p:cNvPr id="770486990" name="Content Placeholder 2"/>
+          <p:cNvPr id="1525617231" name="Content Placeholder 2"/>
           <p:cNvSpPr>
             <a:spLocks noGrp="1"/>
           </p:cNvSpPr>
@@ -2165,7 +2165,7 @@
       </p:sp>
       <p:sp>
         <p:nvSpPr>
-          <p:cNvPr id="966212523" name="Date Placeholder 3"/>
+          <p:cNvPr id="1309607513" name="Date Placeholder 3"/>
           <p:cNvSpPr>
             <a:spLocks noGrp="1"/>
           </p:cNvSpPr>
@@ -2191,7 +2191,7 @@
       </p:sp>
       <p:sp>
         <p:nvSpPr>
-          <p:cNvPr id="1982763651" name="Footer Placeholder 4"/>
+          <p:cNvPr id="470248054" name="Footer Placeholder 4"/>
           <p:cNvSpPr>
             <a:spLocks noGrp="1"/>
           </p:cNvSpPr>
@@ -2213,7 +2213,7 @@
       </p:sp>
       <p:sp>
         <p:nvSpPr>
-          <p:cNvPr id="376897053" name="Slide Number Placeholder 5"/>
+          <p:cNvPr id="654563852" name="Slide Number Placeholder 5"/>
           <p:cNvSpPr>
             <a:spLocks noGrp="1"/>
           </p:cNvSpPr>
@@ -2264,7 +2264,7 @@
       </p:grpSpPr>
       <p:sp>
         <p:nvSpPr>
-          <p:cNvPr id="1055520785" name="Title 1"/>
+          <p:cNvPr id="1407622061" name="Title 1"/>
           <p:cNvSpPr>
             <a:spLocks noGrp="1"/>
           </p:cNvSpPr>
@@ -2299,7 +2299,7 @@
       </p:sp>
       <p:sp>
         <p:nvSpPr>
-          <p:cNvPr id="81288599" name="Text Placeholder 2"/>
+          <p:cNvPr id="67228545" name="Text Placeholder 2"/>
           <p:cNvSpPr>
             <a:spLocks noGrp="1"/>
           </p:cNvSpPr>
@@ -2421,7 +2421,7 @@
       </p:sp>
       <p:sp>
         <p:nvSpPr>
-          <p:cNvPr id="1527586755" name="Date Placeholder 3"/>
+          <p:cNvPr id="119386657" name="Date Placeholder 3"/>
           <p:cNvSpPr>
             <a:spLocks noGrp="1"/>
           </p:cNvSpPr>
@@ -2447,7 +2447,7 @@
       </p:sp>
       <p:sp>
         <p:nvSpPr>
-          <p:cNvPr id="1859555291" name="Footer Placeholder 4"/>
+          <p:cNvPr id="677983103" name="Footer Placeholder 4"/>
           <p:cNvSpPr>
             <a:spLocks noGrp="1"/>
           </p:cNvSpPr>
@@ -2469,7 +2469,7 @@
       </p:sp>
       <p:sp>
         <p:nvSpPr>
-          <p:cNvPr id="1643631687" name="Slide Number Placeholder 5"/>
+          <p:cNvPr id="1400050885" name="Slide Number Placeholder 5"/>
           <p:cNvSpPr>
             <a:spLocks noGrp="1"/>
           </p:cNvSpPr>
@@ -2520,7 +2520,7 @@
       </p:grpSpPr>
       <p:sp>
         <p:nvSpPr>
-          <p:cNvPr id="2120954186" name="Title 1"/>
+          <p:cNvPr id="992417402" name="Title 1"/>
           <p:cNvSpPr>
             <a:spLocks noGrp="1"/>
           </p:cNvSpPr>
@@ -2546,7 +2546,7 @@
       </p:sp>
       <p:sp>
         <p:nvSpPr>
-          <p:cNvPr id="1764149940" name="Content Placeholder 2"/>
+          <p:cNvPr id="1217962474" name="Content Placeholder 2"/>
           <p:cNvSpPr>
             <a:spLocks noGrp="1"/>
           </p:cNvSpPr>
@@ -2617,7 +2617,7 @@
       </p:sp>
       <p:sp>
         <p:nvSpPr>
-          <p:cNvPr id="198430202" name="Content Placeholder 3"/>
+          <p:cNvPr id="396900175" name="Content Placeholder 3"/>
           <p:cNvSpPr>
             <a:spLocks noGrp="1"/>
           </p:cNvSpPr>
@@ -2688,7 +2688,7 @@
       </p:sp>
       <p:sp>
         <p:nvSpPr>
-          <p:cNvPr id="66148284" name="Date Placeholder 4"/>
+          <p:cNvPr id="1236224231" name="Date Placeholder 4"/>
           <p:cNvSpPr>
             <a:spLocks noGrp="1"/>
           </p:cNvSpPr>
@@ -2714,7 +2714,7 @@
       </p:sp>
       <p:sp>
         <p:nvSpPr>
-          <p:cNvPr id="989495443" name="Footer Placeholder 5"/>
+          <p:cNvPr id="1682150675" name="Footer Placeholder 5"/>
           <p:cNvSpPr>
             <a:spLocks noGrp="1"/>
           </p:cNvSpPr>
@@ -2736,7 +2736,7 @@
       </p:sp>
       <p:sp>
         <p:nvSpPr>
-          <p:cNvPr id="1304678393" name="Slide Number Placeholder 6"/>
+          <p:cNvPr id="326496266" name="Slide Number Placeholder 6"/>
           <p:cNvSpPr>
             <a:spLocks noGrp="1"/>
           </p:cNvSpPr>
@@ -2787,7 +2787,7 @@
       </p:grpSpPr>
       <p:sp>
         <p:nvSpPr>
-          <p:cNvPr id="1402392036" name="Title 1"/>
+          <p:cNvPr id="1556539542" name="Title 1"/>
           <p:cNvSpPr>
             <a:spLocks noGrp="1"/>
           </p:cNvSpPr>
@@ -2818,7 +2818,7 @@
       </p:sp>
       <p:sp>
         <p:nvSpPr>
-          <p:cNvPr id="1191524255" name="Text Placeholder 2"/>
+          <p:cNvPr id="1276831955" name="Text Placeholder 2"/>
           <p:cNvSpPr>
             <a:spLocks noGrp="1"/>
           </p:cNvSpPr>
@@ -2886,7 +2886,7 @@
       </p:sp>
       <p:sp>
         <p:nvSpPr>
-          <p:cNvPr id="941391072" name="Content Placeholder 3"/>
+          <p:cNvPr id="1245576634" name="Content Placeholder 3"/>
           <p:cNvSpPr>
             <a:spLocks noGrp="1"/>
           </p:cNvSpPr>
@@ -2957,7 +2957,7 @@
       </p:sp>
       <p:sp>
         <p:nvSpPr>
-          <p:cNvPr id="954660417" name="Text Placeholder 4"/>
+          <p:cNvPr id="1103354538" name="Text Placeholder 4"/>
           <p:cNvSpPr>
             <a:spLocks noGrp="1"/>
           </p:cNvSpPr>
@@ -3025,7 +3025,7 @@
       </p:sp>
       <p:sp>
         <p:nvSpPr>
-          <p:cNvPr id="1757508084" name="Content Placeholder 5"/>
+          <p:cNvPr id="1460111851" name="Content Placeholder 5"/>
           <p:cNvSpPr>
             <a:spLocks noGrp="1"/>
           </p:cNvSpPr>
@@ -3096,7 +3096,7 @@
       </p:sp>
       <p:sp>
         <p:nvSpPr>
-          <p:cNvPr id="487613035" name="Date Placeholder 6"/>
+          <p:cNvPr id="2061645605" name="Date Placeholder 6"/>
           <p:cNvSpPr>
             <a:spLocks noGrp="1"/>
           </p:cNvSpPr>
@@ -3122,7 +3122,7 @@
       </p:sp>
       <p:sp>
         <p:nvSpPr>
-          <p:cNvPr id="1885066501" name="Footer Placeholder 7"/>
+          <p:cNvPr id="1609962626" name="Footer Placeholder 7"/>
           <p:cNvSpPr>
             <a:spLocks noGrp="1"/>
           </p:cNvSpPr>
@@ -3144,7 +3144,7 @@
       </p:sp>
       <p:sp>
         <p:nvSpPr>
-          <p:cNvPr id="1140914704" name="Slide Number Placeholder 8"/>
+          <p:cNvPr id="989714448" name="Slide Number Placeholder 8"/>
           <p:cNvSpPr>
             <a:spLocks noGrp="1"/>
           </p:cNvSpPr>
@@ -3195,7 +3195,7 @@
       </p:grpSpPr>
       <p:sp>
         <p:nvSpPr>
-          <p:cNvPr id="756699901" name="Title 1"/>
+          <p:cNvPr id="1375481597" name="Title 1"/>
           <p:cNvSpPr>
             <a:spLocks noGrp="1"/>
           </p:cNvSpPr>
@@ -3221,7 +3221,7 @@
       </p:sp>
       <p:sp>
         <p:nvSpPr>
-          <p:cNvPr id="591492671" name="Date Placeholder 2"/>
+          <p:cNvPr id="1308886787" name="Date Placeholder 2"/>
           <p:cNvSpPr>
             <a:spLocks noGrp="1"/>
           </p:cNvSpPr>
@@ -3247,7 +3247,7 @@
       </p:sp>
       <p:sp>
         <p:nvSpPr>
-          <p:cNvPr id="1258647339" name="Footer Placeholder 3"/>
+          <p:cNvPr id="753292600" name="Footer Placeholder 3"/>
           <p:cNvSpPr>
             <a:spLocks noGrp="1"/>
           </p:cNvSpPr>
@@ -3269,7 +3269,7 @@
       </p:sp>
       <p:sp>
         <p:nvSpPr>
-          <p:cNvPr id="1103993534" name="Slide Number Placeholder 4"/>
+          <p:cNvPr id="775896481" name="Slide Number Placeholder 4"/>
           <p:cNvSpPr>
             <a:spLocks noGrp="1"/>
           </p:cNvSpPr>
@@ -3320,7 +3320,7 @@
       </p:grpSpPr>
       <p:sp>
         <p:nvSpPr>
-          <p:cNvPr id="575628032" name="Date Placeholder 1"/>
+          <p:cNvPr id="1003993909" name="Date Placeholder 1"/>
           <p:cNvSpPr>
             <a:spLocks noGrp="1"/>
           </p:cNvSpPr>
@@ -3346,7 +3346,7 @@
       </p:sp>
       <p:sp>
         <p:nvSpPr>
-          <p:cNvPr id="1265373995" name="Footer Placeholder 2"/>
+          <p:cNvPr id="1170242247" name="Footer Placeholder 2"/>
           <p:cNvSpPr>
             <a:spLocks noGrp="1"/>
           </p:cNvSpPr>
@@ -3368,7 +3368,7 @@
       </p:sp>
       <p:sp>
         <p:nvSpPr>
-          <p:cNvPr id="814311182" name="Slide Number Placeholder 3"/>
+          <p:cNvPr id="1723059621" name="Slide Number Placeholder 3"/>
           <p:cNvSpPr>
             <a:spLocks noGrp="1"/>
           </p:cNvSpPr>
@@ -3419,7 +3419,7 @@
       </p:grpSpPr>
       <p:sp>
         <p:nvSpPr>
-          <p:cNvPr id="1512180589" name="Title 1"/>
+          <p:cNvPr id="1824840676" name="Title 1"/>
           <p:cNvSpPr>
             <a:spLocks noGrp="1"/>
           </p:cNvSpPr>
@@ -3454,7 +3454,7 @@
       </p:sp>
       <p:sp>
         <p:nvSpPr>
-          <p:cNvPr id="322373734" name="Content Placeholder 2"/>
+          <p:cNvPr id="897275958" name="Content Placeholder 2"/>
           <p:cNvSpPr>
             <a:spLocks noGrp="1"/>
           </p:cNvSpPr>
@@ -3553,7 +3553,7 @@
       </p:sp>
       <p:sp>
         <p:nvSpPr>
-          <p:cNvPr id="950986408" name="Text Placeholder 3"/>
+          <p:cNvPr id="1084292623" name="Text Placeholder 3"/>
           <p:cNvSpPr>
             <a:spLocks noGrp="1"/>
           </p:cNvSpPr>
@@ -3621,7 +3621,7 @@
       </p:sp>
       <p:sp>
         <p:nvSpPr>
-          <p:cNvPr id="296794287" name="Date Placeholder 4"/>
+          <p:cNvPr id="664876613" name="Date Placeholder 4"/>
           <p:cNvSpPr>
             <a:spLocks noGrp="1"/>
           </p:cNvSpPr>
@@ -3647,7 +3647,7 @@
       </p:sp>
       <p:sp>
         <p:nvSpPr>
-          <p:cNvPr id="1809256492" name="Footer Placeholder 5"/>
+          <p:cNvPr id="1484928624" name="Footer Placeholder 5"/>
           <p:cNvSpPr>
             <a:spLocks noGrp="1"/>
           </p:cNvSpPr>
@@ -3669,7 +3669,7 @@
       </p:sp>
       <p:sp>
         <p:nvSpPr>
-          <p:cNvPr id="185882964" name="Slide Number Placeholder 6"/>
+          <p:cNvPr id="1774781456" name="Slide Number Placeholder 6"/>
           <p:cNvSpPr>
             <a:spLocks noGrp="1"/>
           </p:cNvSpPr>
@@ -3720,7 +3720,7 @@
       </p:grpSpPr>
       <p:sp>
         <p:nvSpPr>
-          <p:cNvPr id="671349175" name="Title 1"/>
+          <p:cNvPr id="1692655289" name="Title 1"/>
           <p:cNvSpPr>
             <a:spLocks noGrp="1"/>
           </p:cNvSpPr>
@@ -3755,7 +3755,7 @@
       </p:sp>
       <p:sp>
         <p:nvSpPr>
-          <p:cNvPr id="1185834080" name="Picture Placeholder 2"/>
+          <p:cNvPr id="367659037" name="Picture Placeholder 2"/>
           <p:cNvSpPr>
             <a:spLocks noChangeAspect="1" noGrp="1"/>
           </p:cNvSpPr>
@@ -3823,7 +3823,7 @@
       </p:sp>
       <p:sp>
         <p:nvSpPr>
-          <p:cNvPr id="1453421579" name="Text Placeholder 3"/>
+          <p:cNvPr id="594366860" name="Text Placeholder 3"/>
           <p:cNvSpPr>
             <a:spLocks noGrp="1"/>
           </p:cNvSpPr>
@@ -3891,7 +3891,7 @@
       </p:sp>
       <p:sp>
         <p:nvSpPr>
-          <p:cNvPr id="1675642150" name="Date Placeholder 4"/>
+          <p:cNvPr id="1017726031" name="Date Placeholder 4"/>
           <p:cNvSpPr>
             <a:spLocks noGrp="1"/>
           </p:cNvSpPr>
@@ -3917,7 +3917,7 @@
       </p:sp>
       <p:sp>
         <p:nvSpPr>
-          <p:cNvPr id="477063129" name="Footer Placeholder 5"/>
+          <p:cNvPr id="735407248" name="Footer Placeholder 5"/>
           <p:cNvSpPr>
             <a:spLocks noGrp="1"/>
           </p:cNvSpPr>
@@ -3939,7 +3939,7 @@
       </p:sp>
       <p:sp>
         <p:nvSpPr>
-          <p:cNvPr id="1344483727" name="Slide Number Placeholder 6"/>
+          <p:cNvPr id="1012011199" name="Slide Number Placeholder 6"/>
           <p:cNvSpPr>
             <a:spLocks noGrp="1"/>
           </p:cNvSpPr>
@@ -3999,7 +3999,7 @@
       </p:grpSpPr>
       <p:sp>
         <p:nvSpPr>
-          <p:cNvPr id="394290520" name="Title Placeholder 1"/>
+          <p:cNvPr id="1709874618" name="Title Placeholder 1"/>
           <p:cNvSpPr>
             <a:spLocks noGrp="1"/>
           </p:cNvSpPr>
@@ -4035,7 +4035,7 @@
       </p:sp>
       <p:sp>
         <p:nvSpPr>
-          <p:cNvPr id="1618789324" name="Text Placeholder 2"/>
+          <p:cNvPr id="231809842" name="Text Placeholder 2"/>
           <p:cNvSpPr>
             <a:spLocks noGrp="1"/>
           </p:cNvSpPr>
@@ -4111,7 +4111,7 @@
       </p:sp>
       <p:sp>
         <p:nvSpPr>
-          <p:cNvPr id="1426913988" name="Date Placeholder 3"/>
+          <p:cNvPr id="279037577" name="Date Placeholder 3"/>
           <p:cNvSpPr>
             <a:spLocks noGrp="1"/>
           </p:cNvSpPr>
@@ -4155,7 +4155,7 @@
       </p:sp>
       <p:sp>
         <p:nvSpPr>
-          <p:cNvPr id="612557675" name="Footer Placeholder 4"/>
+          <p:cNvPr id="1061935125" name="Footer Placeholder 4"/>
           <p:cNvSpPr>
             <a:spLocks noGrp="1"/>
           </p:cNvSpPr>
@@ -4195,7 +4195,7 @@
       </p:sp>
       <p:sp>
         <p:nvSpPr>
-          <p:cNvPr id="11830310" name="Slide Number Placeholder 5"/>
+          <p:cNvPr id="1052442540" name="Slide Number Placeholder 5"/>
           <p:cNvSpPr>
             <a:spLocks noGrp="1"/>
           </p:cNvSpPr>
@@ -4555,7 +4555,7 @@
       </p:grpSpPr>
       <p:sp>
         <p:nvSpPr>
-          <p:cNvPr id="88848534" name="Title 1"/>
+          <p:cNvPr id="1153934531" name="Title 1"/>
           <p:cNvSpPr>
             <a:spLocks noGrp="1"/>
           </p:cNvSpPr>
@@ -4599,7 +4599,7 @@
       </p:sp>
       <p:sp>
         <p:nvSpPr>
-          <p:cNvPr id="201125502" name="Subtitle 2"/>
+          <p:cNvPr id="114526824" name="Subtitle 2"/>
           <p:cNvSpPr>
             <a:spLocks noGrp="1"/>
           </p:cNvSpPr>
@@ -4658,7 +4658,7 @@
       </p:grpSpPr>
       <p:sp>
         <p:nvSpPr>
-          <p:cNvPr id="192413148" name="Title 1"/>
+          <p:cNvPr id="1442434765" name="Title 1"/>
           <p:cNvSpPr>
             <a:spLocks noGrp="1"/>
           </p:cNvSpPr>
@@ -4710,7 +4710,7 @@
       </p:sp>
       <p:sp>
         <p:nvSpPr>
-          <p:cNvPr id="82604265" name="Content Placeholder 2"/>
+          <p:cNvPr id="1839877080" name="Content Placeholder 2"/>
           <p:cNvSpPr>
             <a:spLocks noGrp="1"/>
           </p:cNvSpPr>
@@ -4954,7 +4954,18 @@
                 <a:ea typeface="Arial"/>
                 <a:cs typeface="Arial"/>
               </a:rPr>
-              <a:t> Instant version reversal by reverting commits in Git.</a:t>
+              <a:t> Instant version reversal by </a:t>
+            </a:r>
+            <a:r>
+              <a:rPr lang="de-DE" sz="2400" b="0" i="0" u="none" strike="noStrike" cap="none" spc="0">
+                <a:solidFill>
+                  <a:schemeClr val="tx1"/>
+                </a:solidFill>
+                <a:latin typeface="Arial"/>
+                <a:ea typeface="Arial"/>
+                <a:cs typeface="Arial"/>
+              </a:rPr>
+              <a:t>adjusting helm values.yaml file</a:t>
             </a:r>
             <a:endParaRPr/>
           </a:p>
@@ -4995,7 +5006,7 @@
       </p:grpSpPr>
       <p:sp>
         <p:nvSpPr>
-          <p:cNvPr id="279196796" name="Title 1"/>
+          <p:cNvPr id="533622582" name="Title 1"/>
           <p:cNvSpPr>
             <a:spLocks noGrp="1"/>
           </p:cNvSpPr>
@@ -5036,7 +5047,7 @@
       </p:sp>
       <p:sp>
         <p:nvSpPr>
-          <p:cNvPr id="668488309" name="Content Placeholder 2"/>
+          <p:cNvPr id="1274004198" name="Content Placeholder 2"/>
           <p:cNvSpPr>
             <a:spLocks noGrp="1"/>
           </p:cNvSpPr>
@@ -5212,7 +5223,7 @@
       </p:grpSpPr>
       <p:sp>
         <p:nvSpPr>
-          <p:cNvPr id="1045827787" name="Title 1"/>
+          <p:cNvPr id="632886661" name="Title 1"/>
           <p:cNvSpPr>
             <a:spLocks noGrp="1"/>
           </p:cNvSpPr>
@@ -5248,7 +5259,7 @@
       </p:sp>
       <p:sp>
         <p:nvSpPr>
-          <p:cNvPr id="1236963685" name="Content Placeholder 2"/>
+          <p:cNvPr id="1787088650" name="Content Placeholder 2"/>
           <p:cNvSpPr>
             <a:spLocks noGrp="1"/>
           </p:cNvSpPr>
@@ -5474,7 +5485,7 @@
       </p:grpSpPr>
       <p:sp>
         <p:nvSpPr>
-          <p:cNvPr id="553993890" name="Title 1"/>
+          <p:cNvPr id="1068499523" name="Title 1"/>
           <p:cNvSpPr>
             <a:spLocks noGrp="1"/>
           </p:cNvSpPr>
@@ -5515,7 +5526,7 @@
       </p:sp>
       <p:sp>
         <p:nvSpPr>
-          <p:cNvPr id="1351213136" name="Content Placeholder 2"/>
+          <p:cNvPr id="2110979852" name="Content Placeholder 2"/>
           <p:cNvSpPr>
             <a:spLocks noGrp="1"/>
           </p:cNvSpPr>
@@ -5747,7 +5758,7 @@
       </p:sp>
       <p:pic>
         <p:nvPicPr>
-          <p:cNvPr id="835260706" name="Picture 1768224297"/>
+          <p:cNvPr id="463589700" name="Picture 1768224297"/>
           <p:cNvPicPr>
             <a:picLocks noChangeAspect="1"/>
           </p:cNvPicPr>
@@ -5804,7 +5815,7 @@
       </p:grpSpPr>
       <p:sp>
         <p:nvSpPr>
-          <p:cNvPr id="1092313547" name="Title 1"/>
+          <p:cNvPr id="1973836247" name="Title 1"/>
           <p:cNvSpPr>
             <a:spLocks noGrp="1"/>
           </p:cNvSpPr>
@@ -5853,7 +5864,7 @@
       </p:sp>
       <p:pic>
         <p:nvPicPr>
-          <p:cNvPr id="553329486" name=""/>
+          <p:cNvPr id="599180460" name=""/>
           <p:cNvPicPr>
             <a:picLocks noChangeAspect="1"/>
           </p:cNvPicPr>
@@ -5908,7 +5919,7 @@
       </p:grpSpPr>
       <p:sp>
         <p:nvSpPr>
-          <p:cNvPr id="1417378405" name="Title 1"/>
+          <p:cNvPr id="959512306" name="Title 1"/>
           <p:cNvSpPr>
             <a:spLocks noGrp="1"/>
           </p:cNvSpPr>
@@ -5971,7 +5982,7 @@
       </p:sp>
       <p:sp>
         <p:nvSpPr>
-          <p:cNvPr id="2043573913" name="Content Placeholder 2"/>
+          <p:cNvPr id="1231956884" name="Content Placeholder 2"/>
           <p:cNvSpPr>
             <a:spLocks noGrp="1"/>
           </p:cNvSpPr>
@@ -6179,7 +6190,7 @@
       </p:sp>
       <p:pic>
         <p:nvPicPr>
-          <p:cNvPr id="335096278" name=""/>
+          <p:cNvPr id="945024492" name=""/>
           <p:cNvPicPr>
             <a:picLocks noChangeAspect="1"/>
           </p:cNvPicPr>
@@ -6207,7 +6218,7 @@
       </p:pic>
       <p:pic>
         <p:nvPicPr>
-          <p:cNvPr id="253107692" name="Picture 2117951868"/>
+          <p:cNvPr id="1030579927" name="Picture 2117951868"/>
           <p:cNvPicPr>
             <a:picLocks noChangeAspect="1"/>
           </p:cNvPicPr>
@@ -6235,7 +6246,7 @@
       </p:pic>
       <p:pic>
         <p:nvPicPr>
-          <p:cNvPr id="1156825612" name=""/>
+          <p:cNvPr id="1355854782" name=""/>
           <p:cNvPicPr>
             <a:picLocks noChangeAspect="1"/>
           </p:cNvPicPr>
@@ -6263,7 +6274,7 @@
       </p:pic>
       <p:pic>
         <p:nvPicPr>
-          <p:cNvPr id="2087890642" name=""/>
+          <p:cNvPr id="185570947" name=""/>
           <p:cNvPicPr>
             <a:picLocks noChangeAspect="1"/>
           </p:cNvPicPr>
@@ -6284,7 +6295,7 @@
       </p:pic>
       <p:pic>
         <p:nvPicPr>
-          <p:cNvPr id="795993055" name=""/>
+          <p:cNvPr id="1086355164" name=""/>
           <p:cNvPicPr>
             <a:picLocks noChangeAspect="1"/>
           </p:cNvPicPr>
@@ -6306,7 +6317,7 @@
       </p:pic>
       <p:pic>
         <p:nvPicPr>
-          <p:cNvPr id="1931741215" name=""/>
+          <p:cNvPr id="943005216" name=""/>
           <p:cNvPicPr>
             <a:picLocks noChangeAspect="1"/>
           </p:cNvPicPr>
@@ -6334,7 +6345,7 @@
       </p:pic>
       <p:pic>
         <p:nvPicPr>
-          <p:cNvPr id="228206900" name=""/>
+          <p:cNvPr id="804847083" name=""/>
           <p:cNvPicPr>
             <a:picLocks noChangeAspect="1"/>
           </p:cNvPicPr>
@@ -6362,7 +6373,7 @@
       </p:pic>
       <p:pic>
         <p:nvPicPr>
-          <p:cNvPr id="570642535" name=""/>
+          <p:cNvPr id="1073045171" name=""/>
           <p:cNvPicPr>
             <a:picLocks noChangeAspect="1"/>
           </p:cNvPicPr>
@@ -6384,7 +6395,7 @@
       </p:pic>
       <p:pic>
         <p:nvPicPr>
-          <p:cNvPr id="255939523" name=""/>
+          <p:cNvPr id="411521704" name=""/>
           <p:cNvPicPr>
             <a:picLocks noChangeAspect="1"/>
           </p:cNvPicPr>
@@ -6412,7 +6423,7 @@
       </p:pic>
       <p:pic>
         <p:nvPicPr>
-          <p:cNvPr id="1520067139" name=""/>
+          <p:cNvPr id="1988657479" name=""/>
           <p:cNvPicPr>
             <a:picLocks noChangeAspect="1"/>
           </p:cNvPicPr>
@@ -6434,7 +6445,7 @@
       </p:pic>
       <p:pic>
         <p:nvPicPr>
-          <p:cNvPr id="82621506" name=""/>
+          <p:cNvPr id="1088646466" name=""/>
           <p:cNvPicPr>
             <a:picLocks noChangeAspect="1"/>
           </p:cNvPicPr>
@@ -6462,7 +6473,7 @@
       </p:pic>
       <p:pic>
         <p:nvPicPr>
-          <p:cNvPr id="1830518600" name=""/>
+          <p:cNvPr id="1269231043" name=""/>
           <p:cNvPicPr>
             <a:picLocks noChangeAspect="1"/>
           </p:cNvPicPr>
@@ -6490,7 +6501,7 @@
       </p:pic>
       <p:pic>
         <p:nvPicPr>
-          <p:cNvPr id="1510756753" name=""/>
+          <p:cNvPr id="1391092152" name=""/>
           <p:cNvPicPr>
             <a:picLocks noChangeAspect="1"/>
           </p:cNvPicPr>
@@ -6512,7 +6523,7 @@
       </p:pic>
       <p:pic>
         <p:nvPicPr>
-          <p:cNvPr id="1254660316" name=""/>
+          <p:cNvPr id="577444839" name=""/>
           <p:cNvPicPr>
             <a:picLocks noChangeAspect="1"/>
           </p:cNvPicPr>
@@ -6540,7 +6551,7 @@
       </p:pic>
       <p:pic>
         <p:nvPicPr>
-          <p:cNvPr id="1859947834" name=""/>
+          <p:cNvPr id="655157902" name=""/>
           <p:cNvPicPr>
             <a:picLocks noChangeAspect="1"/>
           </p:cNvPicPr>
@@ -6562,7 +6573,7 @@
       </p:pic>
       <p:pic>
         <p:nvPicPr>
-          <p:cNvPr id="513385322" name=""/>
+          <p:cNvPr id="1437584819" name=""/>
           <p:cNvPicPr>
             <a:picLocks noChangeAspect="1"/>
           </p:cNvPicPr>
@@ -6590,7 +6601,7 @@
       </p:pic>
       <p:pic>
         <p:nvPicPr>
-          <p:cNvPr id="153589109" name=""/>
+          <p:cNvPr id="968793316" name=""/>
           <p:cNvPicPr>
             <a:picLocks noChangeAspect="1"/>
           </p:cNvPicPr>
@@ -6618,7 +6629,7 @@
       </p:pic>
       <p:pic>
         <p:nvPicPr>
-          <p:cNvPr id="1928618071" name=""/>
+          <p:cNvPr id="1838706362" name=""/>
           <p:cNvPicPr>
             <a:picLocks noChangeAspect="1"/>
           </p:cNvPicPr>
@@ -6640,7 +6651,7 @@
       </p:pic>
       <p:pic>
         <p:nvPicPr>
-          <p:cNvPr id="985684494" name=""/>
+          <p:cNvPr id="257500707" name=""/>
           <p:cNvPicPr>
             <a:picLocks noChangeAspect="1"/>
           </p:cNvPicPr>
@@ -6668,7 +6679,7 @@
       </p:pic>
       <p:pic>
         <p:nvPicPr>
-          <p:cNvPr id="1938280628" name=""/>
+          <p:cNvPr id="2023004210" name=""/>
           <p:cNvPicPr>
             <a:picLocks noChangeAspect="1"/>
           </p:cNvPicPr>
@@ -6723,7 +6734,7 @@
       </p:grpSpPr>
       <p:sp>
         <p:nvSpPr>
-          <p:cNvPr id="532287965" name="Title 1"/>
+          <p:cNvPr id="1559638736" name="Title 1"/>
           <p:cNvSpPr>
             <a:spLocks noGrp="1"/>
           </p:cNvSpPr>
@@ -6775,7 +6786,7 @@
       </p:sp>
       <p:sp>
         <p:nvSpPr>
-          <p:cNvPr id="1915774053" name="Content Placeholder 2"/>
+          <p:cNvPr id="1064399008" name="Content Placeholder 2"/>
           <p:cNvSpPr>
             <a:spLocks noGrp="1"/>
           </p:cNvSpPr>
@@ -6952,6 +6963,188 @@
               <a:latin typeface="Nimbus Sans"/>
               <a:cs typeface="Nimbus Sans"/>
             </a:endParaRPr>
+          </a:p>
+        </p:txBody>
+      </p:sp>
+      <p:sp>
+        <p:nvSpPr>
+          <p:cNvPr id="1393893493" name=""/>
+          <p:cNvSpPr/>
+          <p:nvPr/>
+        </p:nvSpPr>
+        <p:spPr bwMode="auto">
+          <a:xfrm>
+            <a:off x="7472800" y="4852587"/>
+            <a:ext cx="4271555" cy="1669140"/>
+          </a:xfrm>
+        </p:spPr>
+        <p:txBody>
+          <a:bodyPr rot="0" spcFirstLastPara="0" vertOverflow="overflow" horzOverflow="overflow" vert="horz" wrap="square" lIns="91440" tIns="45720" rIns="91440" bIns="45720" numCol="1" spcCol="0" rtlCol="0" fromWordArt="0" anchor="t" anchorCtr="0" forceAA="0" upright="0" compatLnSpc="1">
+            <a:prstTxWarp prst="textNoShape"/>
+            <a:spAutoFit/>
+          </a:bodyPr>
+          <a:p>
+            <a:pPr>
+              <a:defRPr/>
+            </a:pPr>
+            <a:r>
+              <a:rPr sz="1150" b="0" i="0" u="none">
+                <a:solidFill>
+                  <a:srgbClr val="067D17"/>
+                </a:solidFill>
+                <a:latin typeface="Ubuntu Mono"/>
+                <a:ea typeface="Ubuntu Mono"/>
+                <a:cs typeface="Ubuntu Mono"/>
+              </a:rPr>
+              <a:t># 1. Global Cluster Services (Ingress, SSL, GitOps)</a:t>
+            </a:r>
+            <a:br>
+              <a:rPr sz="1150" b="0" i="0" u="none">
+                <a:solidFill>
+                  <a:srgbClr val="067D17"/>
+                </a:solidFill>
+                <a:latin typeface="Ubuntu Mono"/>
+                <a:ea typeface="Ubuntu Mono"/>
+                <a:cs typeface="Ubuntu Mono"/>
+              </a:rPr>
+            </a:br>
+            <a:r>
+              <a:rPr sz="1150" b="0" i="0" u="none">
+                <a:solidFill>
+                  <a:srgbClr val="067D17"/>
+                </a:solidFill>
+                <a:latin typeface="Ubuntu Mono"/>
+                <a:ea typeface="Ubuntu Mono"/>
+                <a:cs typeface="Ubuntu Mono"/>
+              </a:rPr>
+              <a:t>cd infra &amp;&amp; terraform init &amp;&amp; terraform apply</a:t>
+            </a:r>
+            <a:br>
+              <a:rPr sz="1150" b="0" i="0" u="none">
+                <a:solidFill>
+                  <a:srgbClr val="067D17"/>
+                </a:solidFill>
+                <a:latin typeface="Ubuntu Mono"/>
+                <a:ea typeface="Ubuntu Mono"/>
+                <a:cs typeface="Ubuntu Mono"/>
+              </a:rPr>
+            </a:br>
+            <a:br>
+              <a:rPr sz="1150" b="0" i="0" u="none">
+                <a:solidFill>
+                  <a:srgbClr val="067D17"/>
+                </a:solidFill>
+                <a:latin typeface="Ubuntu Mono"/>
+                <a:ea typeface="Ubuntu Mono"/>
+                <a:cs typeface="Ubuntu Mono"/>
+              </a:rPr>
+            </a:br>
+            <a:r>
+              <a:rPr sz="1150" b="0" i="0" u="none">
+                <a:solidFill>
+                  <a:srgbClr val="067D17"/>
+                </a:solidFill>
+                <a:latin typeface="Ubuntu Mono"/>
+                <a:ea typeface="Ubuntu Mono"/>
+                <a:cs typeface="Ubuntu Mono"/>
+              </a:rPr>
+              <a:t># 2. Environment Setup (Namespaces, Databases, Secrets)</a:t>
+            </a:r>
+            <a:br>
+              <a:rPr sz="1150" b="0" i="0" u="none">
+                <a:solidFill>
+                  <a:srgbClr val="067D17"/>
+                </a:solidFill>
+                <a:latin typeface="Ubuntu Mono"/>
+                <a:ea typeface="Ubuntu Mono"/>
+                <a:cs typeface="Ubuntu Mono"/>
+              </a:rPr>
+            </a:br>
+            <a:r>
+              <a:rPr sz="1150" b="0" i="0" u="none">
+                <a:solidFill>
+                  <a:srgbClr val="067D17"/>
+                </a:solidFill>
+                <a:latin typeface="Ubuntu Mono"/>
+                <a:ea typeface="Ubuntu Mono"/>
+                <a:cs typeface="Ubuntu Mono"/>
+              </a:rPr>
+              <a:t>cd ../environments/dev  &amp;&amp; terraform apply</a:t>
+            </a:r>
+            <a:br>
+              <a:rPr sz="1150" b="0" i="0" u="none">
+                <a:solidFill>
+                  <a:srgbClr val="067D17"/>
+                </a:solidFill>
+                <a:latin typeface="Ubuntu Mono"/>
+                <a:ea typeface="Ubuntu Mono"/>
+                <a:cs typeface="Ubuntu Mono"/>
+              </a:rPr>
+            </a:br>
+            <a:r>
+              <a:rPr sz="1150" b="0" i="0" u="none">
+                <a:solidFill>
+                  <a:srgbClr val="067D17"/>
+                </a:solidFill>
+                <a:latin typeface="Ubuntu Mono"/>
+                <a:ea typeface="Ubuntu Mono"/>
+                <a:cs typeface="Ubuntu Mono"/>
+              </a:rPr>
+              <a:t>cd ../environments/prod &amp;&amp; terraform apply</a:t>
+            </a:r>
+            <a:br>
+              <a:rPr sz="1150" b="0" i="0" u="none">
+                <a:solidFill>
+                  <a:srgbClr val="067D17"/>
+                </a:solidFill>
+                <a:latin typeface="Ubuntu Mono"/>
+                <a:ea typeface="Ubuntu Mono"/>
+                <a:cs typeface="Ubuntu Mono"/>
+              </a:rPr>
+            </a:br>
+            <a:br>
+              <a:rPr sz="1150" b="0" i="0" u="none">
+                <a:solidFill>
+                  <a:srgbClr val="067D17"/>
+                </a:solidFill>
+                <a:latin typeface="Ubuntu Mono"/>
+                <a:ea typeface="Ubuntu Mono"/>
+                <a:cs typeface="Ubuntu Mono"/>
+              </a:rPr>
+            </a:br>
+            <a:r>
+              <a:rPr sz="1150" b="0" i="0" u="none">
+                <a:solidFill>
+                  <a:srgbClr val="067D17"/>
+                </a:solidFill>
+                <a:latin typeface="Ubuntu Mono"/>
+                <a:ea typeface="Ubuntu Mono"/>
+                <a:cs typeface="Ubuntu Mono"/>
+              </a:rPr>
+              <a:t># 3. Trigger Application Sync</a:t>
+            </a:r>
+            <a:br>
+              <a:rPr sz="1150" b="0" i="0" u="none">
+                <a:solidFill>
+                  <a:srgbClr val="067D17"/>
+                </a:solidFill>
+                <a:latin typeface="Ubuntu Mono"/>
+                <a:ea typeface="Ubuntu Mono"/>
+                <a:cs typeface="Ubuntu Mono"/>
+              </a:rPr>
+            </a:br>
+            <a:r>
+              <a:rPr sz="1150" b="0" i="0" u="none">
+                <a:solidFill>
+                  <a:srgbClr val="067D17"/>
+                </a:solidFill>
+                <a:latin typeface="Ubuntu Mono"/>
+                <a:ea typeface="Ubuntu Mono"/>
+                <a:cs typeface="Ubuntu Mono"/>
+              </a:rPr>
+              <a:t>kubectl apply -f argocd/app-of-apps.yaml</a:t>
+            </a:r>
+            <a:endParaRPr/>
           </a:p>
         </p:txBody>
       </p:sp>
@@ -6990,7 +7183,7 @@
       </p:grpSpPr>
       <p:sp>
         <p:nvSpPr>
-          <p:cNvPr id="477352620" name="Title 1"/>
+          <p:cNvPr id="77339441" name="Title 1"/>
           <p:cNvSpPr>
             <a:spLocks noGrp="1"/>
           </p:cNvSpPr>
@@ -7031,7 +7224,7 @@
       </p:sp>
       <p:sp>
         <p:nvSpPr>
-          <p:cNvPr id="1715781888" name="Content Placeholder 2"/>
+          <p:cNvPr id="1584460932" name="Content Placeholder 2"/>
           <p:cNvSpPr>
             <a:spLocks noGrp="1"/>
           </p:cNvSpPr>
@@ -7360,7 +7553,7 @@
       </p:sp>
       <p:pic>
         <p:nvPicPr>
-          <p:cNvPr id="871687217" name=""/>
+          <p:cNvPr id="1420469797" name=""/>
           <p:cNvPicPr>
             <a:picLocks noChangeAspect="1"/>
           </p:cNvPicPr>
@@ -7424,7 +7617,7 @@
       </p:grpSpPr>
       <p:sp>
         <p:nvSpPr>
-          <p:cNvPr id="127189879" name="Title 1"/>
+          <p:cNvPr id="1151276406" name="Title 1"/>
           <p:cNvSpPr>
             <a:spLocks noGrp="1"/>
           </p:cNvSpPr>
@@ -7465,7 +7658,7 @@
       </p:sp>
       <p:sp>
         <p:nvSpPr>
-          <p:cNvPr id="490614381" name="Content Placeholder 2"/>
+          <p:cNvPr id="1735584504" name="Content Placeholder 2"/>
           <p:cNvSpPr>
             <a:spLocks noGrp="1"/>
           </p:cNvSpPr>
@@ -7800,7 +7993,7 @@
       </p:sp>
       <p:sp>
         <p:nvSpPr>
-          <p:cNvPr id="1888666800" name=""/>
+          <p:cNvPr id="581121990" name=""/>
           <p:cNvSpPr txBox="1"/>
           <p:nvPr/>
         </p:nvSpPr>
@@ -9083,7 +9276,7 @@
       </p:grpSpPr>
       <p:sp>
         <p:nvSpPr>
-          <p:cNvPr id="476144125" name="Title 1"/>
+          <p:cNvPr id="1333908543" name="Title 1"/>
           <p:cNvSpPr>
             <a:spLocks noGrp="1"/>
           </p:cNvSpPr>
@@ -9135,7 +9328,7 @@
       </p:sp>
       <p:pic>
         <p:nvPicPr>
-          <p:cNvPr id="31673201" name=""/>
+          <p:cNvPr id="312361498" name=""/>
           <p:cNvPicPr>
             <a:picLocks noChangeAspect="1"/>
           </p:cNvPicPr>
